--- a/KAILA_Founder_Grade_Package/KAILA Founder Presentation/presentation/KAILA_Right_Path_Startup_Guide_Presentation.pptx
+++ b/KAILA_Founder_Grade_Package/KAILA Founder Presentation/presentation/KAILA_Right_Path_Startup_Guide_Presentation.pptx
@@ -2467,6 +2467,10 @@
             <a:prstDash val="solid"/>
           </a:ln>
         </p:spPr>
+        <p:txBody>
+          <a:bodyPr/>
+          <a:p/>
+        </p:txBody>
       </p:sp>
       <p:sp>
         <p:nvSpPr>
@@ -2492,6 +2496,10 @@
             <a:prstDash val="solid"/>
           </a:ln>
         </p:spPr>
+        <p:txBody>
+          <a:bodyPr/>
+          <a:p/>
+        </p:txBody>
       </p:sp>
       <p:sp>
         <p:nvSpPr>
@@ -2517,6 +2525,10 @@
             <a:prstDash val="solid"/>
           </a:ln>
         </p:spPr>
+        <p:txBody>
+          <a:bodyPr/>
+          <a:p/>
+        </p:txBody>
       </p:sp>
       <p:sp>
         <p:nvSpPr>
@@ -2900,6 +2912,10 @@
             <a:prstDash val="solid"/>
           </a:ln>
         </p:spPr>
+        <p:txBody>
+          <a:bodyPr/>
+          <a:p/>
+        </p:txBody>
       </p:sp>
       <p:sp>
         <p:nvSpPr>
@@ -2927,6 +2943,10 @@
             <a:prstDash val="solid"/>
           </a:ln>
         </p:spPr>
+        <p:txBody>
+          <a:bodyPr/>
+          <a:p/>
+        </p:txBody>
       </p:sp>
       <p:sp>
         <p:nvSpPr>
@@ -2992,6 +3012,10 @@
             <a:prstDash val="solid"/>
           </a:ln>
         </p:spPr>
+        <p:txBody>
+          <a:bodyPr/>
+          <a:p/>
+        </p:txBody>
       </p:sp>
       <p:sp>
         <p:nvSpPr>
@@ -3057,6 +3081,10 @@
             <a:prstDash val="solid"/>
           </a:ln>
         </p:spPr>
+        <p:txBody>
+          <a:bodyPr/>
+          <a:p/>
+        </p:txBody>
       </p:sp>
       <p:sp>
         <p:nvSpPr>
@@ -3122,6 +3150,10 @@
             <a:prstDash val="solid"/>
           </a:ln>
         </p:spPr>
+        <p:txBody>
+          <a:bodyPr/>
+          <a:p/>
+        </p:txBody>
       </p:sp>
       <p:sp>
         <p:nvSpPr>
@@ -3187,6 +3219,10 @@
             <a:prstDash val="solid"/>
           </a:ln>
         </p:spPr>
+        <p:txBody>
+          <a:bodyPr/>
+          <a:p/>
+        </p:txBody>
       </p:sp>
       <p:sp>
         <p:nvSpPr>
@@ -3252,6 +3288,10 @@
             <a:prstDash val="solid"/>
           </a:ln>
         </p:spPr>
+        <p:txBody>
+          <a:bodyPr/>
+          <a:p/>
+        </p:txBody>
       </p:sp>
       <p:sp>
         <p:nvSpPr>
@@ -3317,6 +3357,10 @@
             <a:prstDash val="solid"/>
           </a:ln>
         </p:spPr>
+        <p:txBody>
+          <a:bodyPr/>
+          <a:p/>
+        </p:txBody>
       </p:sp>
       <p:sp>
         <p:nvSpPr>
@@ -3382,6 +3426,10 @@
             <a:prstDash val="solid"/>
           </a:ln>
         </p:spPr>
+        <p:txBody>
+          <a:bodyPr/>
+          <a:p/>
+        </p:txBody>
       </p:sp>
       <p:sp>
         <p:nvSpPr>
@@ -3447,6 +3495,10 @@
             <a:prstDash val="solid"/>
           </a:ln>
         </p:spPr>
+        <p:txBody>
+          <a:bodyPr/>
+          <a:p/>
+        </p:txBody>
       </p:sp>
       <p:sp>
         <p:nvSpPr>
@@ -3512,6 +3564,10 @@
             <a:prstDash val="solid"/>
           </a:ln>
         </p:spPr>
+        <p:txBody>
+          <a:bodyPr/>
+          <a:p/>
+        </p:txBody>
       </p:sp>
       <p:sp>
         <p:nvSpPr>
@@ -3789,6 +3845,10 @@
             <a:prstDash val="solid"/>
           </a:ln>
         </p:spPr>
+        <p:txBody>
+          <a:bodyPr/>
+          <a:p/>
+        </p:txBody>
       </p:sp>
       <p:sp>
         <p:nvSpPr>
@@ -3814,6 +3874,10 @@
             <a:tailEnd type="triangle"/>
           </a:ln>
         </p:spPr>
+        <p:txBody>
+          <a:bodyPr/>
+          <a:p/>
+        </p:txBody>
       </p:sp>
       <p:sp>
         <p:nvSpPr>
@@ -3839,6 +3903,10 @@
             <a:tailEnd type="triangle"/>
           </a:ln>
         </p:spPr>
+        <p:txBody>
+          <a:bodyPr/>
+          <a:p/>
+        </p:txBody>
       </p:sp>
       <p:sp>
         <p:nvSpPr>
@@ -3864,6 +3932,10 @@
             <a:tailEnd type="triangle"/>
           </a:ln>
         </p:spPr>
+        <p:txBody>
+          <a:bodyPr/>
+          <a:p/>
+        </p:txBody>
       </p:sp>
       <p:sp>
         <p:nvSpPr>
@@ -3889,6 +3961,10 @@
             <a:tailEnd type="triangle"/>
           </a:ln>
         </p:spPr>
+        <p:txBody>
+          <a:bodyPr/>
+          <a:p/>
+        </p:txBody>
       </p:sp>
       <p:sp>
         <p:nvSpPr>
@@ -3914,6 +3990,10 @@
             <a:tailEnd type="triangle"/>
           </a:ln>
         </p:spPr>
+        <p:txBody>
+          <a:bodyPr/>
+          <a:p/>
+        </p:txBody>
       </p:sp>
       <p:sp>
         <p:nvSpPr>
@@ -3941,6 +4021,10 @@
             <a:prstDash val="solid"/>
           </a:ln>
         </p:spPr>
+        <p:txBody>
+          <a:bodyPr/>
+          <a:p/>
+        </p:txBody>
       </p:sp>
       <p:sp>
         <p:nvSpPr>
@@ -4006,6 +4090,10 @@
             <a:prstDash val="solid"/>
           </a:ln>
         </p:spPr>
+        <p:txBody>
+          <a:bodyPr/>
+          <a:p/>
+        </p:txBody>
       </p:sp>
       <p:sp>
         <p:nvSpPr>
@@ -4071,6 +4159,10 @@
             <a:prstDash val="solid"/>
           </a:ln>
         </p:spPr>
+        <p:txBody>
+          <a:bodyPr/>
+          <a:p/>
+        </p:txBody>
       </p:sp>
       <p:sp>
         <p:nvSpPr>
@@ -4136,6 +4228,10 @@
             <a:prstDash val="solid"/>
           </a:ln>
         </p:spPr>
+        <p:txBody>
+          <a:bodyPr/>
+          <a:p/>
+        </p:txBody>
       </p:sp>
       <p:sp>
         <p:nvSpPr>
@@ -4201,6 +4297,10 @@
             <a:prstDash val="solid"/>
           </a:ln>
         </p:spPr>
+        <p:txBody>
+          <a:bodyPr/>
+          <a:p/>
+        </p:txBody>
       </p:sp>
       <p:sp>
         <p:nvSpPr>
@@ -4266,6 +4366,10 @@
             <a:prstDash val="solid"/>
           </a:ln>
         </p:spPr>
+        <p:txBody>
+          <a:bodyPr/>
+          <a:p/>
+        </p:txBody>
       </p:sp>
       <p:sp>
         <p:nvSpPr>
@@ -4331,6 +4435,10 @@
             <a:prstDash val="solid"/>
           </a:ln>
         </p:spPr>
+        <p:txBody>
+          <a:bodyPr/>
+          <a:p/>
+        </p:txBody>
       </p:sp>
       <p:sp>
         <p:nvSpPr>
@@ -4572,6 +4680,10 @@
             <a:prstDash val="solid"/>
           </a:ln>
         </p:spPr>
+        <p:txBody>
+          <a:bodyPr/>
+          <a:p/>
+        </p:txBody>
       </p:sp>
       <p:sp>
         <p:nvSpPr>
@@ -4599,6 +4711,10 @@
             <a:prstDash val="solid"/>
           </a:ln>
         </p:spPr>
+        <p:txBody>
+          <a:bodyPr/>
+          <a:p/>
+        </p:txBody>
       </p:sp>
       <p:sp>
         <p:nvSpPr>
@@ -5004,6 +5120,10 @@
             <a:prstDash val="solid"/>
           </a:ln>
         </p:spPr>
+        <p:txBody>
+          <a:bodyPr/>
+          <a:p/>
+        </p:txBody>
       </p:sp>
       <p:sp>
         <p:nvSpPr>
@@ -5031,6 +5151,10 @@
             <a:prstDash val="solid"/>
           </a:ln>
         </p:spPr>
+        <p:txBody>
+          <a:bodyPr/>
+          <a:p/>
+        </p:txBody>
       </p:sp>
       <p:sp>
         <p:nvSpPr>
@@ -5110,6 +5234,10 @@
             <a:prstDash val="solid"/>
           </a:ln>
         </p:spPr>
+        <p:txBody>
+          <a:bodyPr/>
+          <a:p/>
+        </p:txBody>
       </p:sp>
       <p:sp>
         <p:nvSpPr>
@@ -5189,6 +5317,10 @@
             <a:prstDash val="solid"/>
           </a:ln>
         </p:spPr>
+        <p:txBody>
+          <a:bodyPr/>
+          <a:p/>
+        </p:txBody>
       </p:sp>
       <p:sp>
         <p:nvSpPr>
@@ -5268,6 +5400,10 @@
             <a:prstDash val="solid"/>
           </a:ln>
         </p:spPr>
+        <p:txBody>
+          <a:bodyPr/>
+          <a:p/>
+        </p:txBody>
       </p:sp>
       <p:sp>
         <p:nvSpPr>
@@ -5347,6 +5483,10 @@
             <a:prstDash val="solid"/>
           </a:ln>
         </p:spPr>
+        <p:txBody>
+          <a:bodyPr/>
+          <a:p/>
+        </p:txBody>
       </p:sp>
       <p:sp>
         <p:nvSpPr>
@@ -5426,6 +5566,10 @@
             <a:prstDash val="solid"/>
           </a:ln>
         </p:spPr>
+        <p:txBody>
+          <a:bodyPr/>
+          <a:p/>
+        </p:txBody>
       </p:sp>
       <p:sp>
         <p:nvSpPr>
@@ -5505,6 +5649,10 @@
             <a:prstDash val="solid"/>
           </a:ln>
         </p:spPr>
+        <p:txBody>
+          <a:bodyPr/>
+          <a:p/>
+        </p:txBody>
       </p:sp>
       <p:sp>
         <p:nvSpPr>
@@ -5584,6 +5732,10 @@
             <a:prstDash val="solid"/>
           </a:ln>
         </p:spPr>
+        <p:txBody>
+          <a:bodyPr/>
+          <a:p/>
+        </p:txBody>
       </p:sp>
       <p:sp>
         <p:nvSpPr>
@@ -5875,6 +6027,10 @@
             <a:prstDash val="solid"/>
           </a:ln>
         </p:spPr>
+        <p:txBody>
+          <a:bodyPr/>
+          <a:p/>
+        </p:txBody>
       </p:sp>
       <p:sp>
         <p:nvSpPr>
@@ -5902,6 +6058,10 @@
             <a:prstDash val="solid"/>
           </a:ln>
         </p:spPr>
+        <p:txBody>
+          <a:bodyPr/>
+          <a:p/>
+        </p:txBody>
       </p:sp>
       <p:sp>
         <p:nvSpPr>
@@ -5987,6 +6147,10 @@
             <a:prstDash val="solid"/>
           </a:ln>
         </p:spPr>
+        <p:txBody>
+          <a:bodyPr/>
+          <a:p/>
+        </p:txBody>
       </p:sp>
       <p:sp>
         <p:nvSpPr>
@@ -6072,6 +6236,10 @@
             <a:prstDash val="solid"/>
           </a:ln>
         </p:spPr>
+        <p:txBody>
+          <a:bodyPr/>
+          <a:p/>
+        </p:txBody>
       </p:sp>
       <p:sp>
         <p:nvSpPr>
@@ -6369,6 +6537,10 @@
             <a:prstDash val="solid"/>
           </a:ln>
         </p:spPr>
+        <p:txBody>
+          <a:bodyPr/>
+          <a:p/>
+        </p:txBody>
       </p:sp>
       <p:sp>
         <p:nvSpPr>
@@ -6396,6 +6568,10 @@
             <a:prstDash val="solid"/>
           </a:ln>
         </p:spPr>
+        <p:txBody>
+          <a:bodyPr/>
+          <a:p/>
+        </p:txBody>
       </p:sp>
       <p:sp>
         <p:nvSpPr>
@@ -6537,6 +6713,10 @@
             <a:prstDash val="solid"/>
           </a:ln>
         </p:spPr>
+        <p:txBody>
+          <a:bodyPr/>
+          <a:p/>
+        </p:txBody>
       </p:sp>
       <p:sp>
         <p:nvSpPr>
@@ -6678,6 +6858,10 @@
             <a:prstDash val="solid"/>
           </a:ln>
         </p:spPr>
+        <p:txBody>
+          <a:bodyPr/>
+          <a:p/>
+        </p:txBody>
       </p:sp>
       <p:sp>
         <p:nvSpPr>
@@ -6995,6 +7179,10 @@
             <a:prstDash val="solid"/>
           </a:ln>
         </p:spPr>
+        <p:txBody>
+          <a:bodyPr/>
+          <a:p/>
+        </p:txBody>
       </p:sp>
       <p:sp>
         <p:nvSpPr>
@@ -7022,6 +7210,10 @@
             <a:prstDash val="solid"/>
           </a:ln>
         </p:spPr>
+        <p:txBody>
+          <a:bodyPr/>
+          <a:p/>
+        </p:txBody>
       </p:sp>
       <p:sp>
         <p:nvSpPr>
@@ -7087,6 +7279,10 @@
             <a:prstDash val="solid"/>
           </a:ln>
         </p:spPr>
+        <p:txBody>
+          <a:bodyPr/>
+          <a:p/>
+        </p:txBody>
       </p:sp>
       <p:sp>
         <p:nvSpPr>
@@ -7152,6 +7348,10 @@
             <a:prstDash val="solid"/>
           </a:ln>
         </p:spPr>
+        <p:txBody>
+          <a:bodyPr/>
+          <a:p/>
+        </p:txBody>
       </p:sp>
       <p:sp>
         <p:nvSpPr>
@@ -7185,7 +7385,7 @@
                   <a:srgbClr val="9B2C2C"/>
                 </a:solidFill>
               </a:rPr>
-              <a:t>Native mobile apps</a:t>
+              <a:t>Native app polish beyond the current wrapper</a:t>
             </a:r>
             <a:endParaRPr lang="en-US" sz="1600" dirty="0"/>
           </a:p>
@@ -7217,6 +7417,10 @@
             <a:prstDash val="solid"/>
           </a:ln>
         </p:spPr>
+        <p:txBody>
+          <a:bodyPr/>
+          <a:p/>
+        </p:txBody>
       </p:sp>
       <p:sp>
         <p:nvSpPr>
@@ -7282,6 +7486,10 @@
             <a:prstDash val="solid"/>
           </a:ln>
         </p:spPr>
+        <p:txBody>
+          <a:bodyPr/>
+          <a:p/>
+        </p:txBody>
       </p:sp>
       <p:sp>
         <p:nvSpPr>
@@ -7347,6 +7555,10 @@
             <a:prstDash val="solid"/>
           </a:ln>
         </p:spPr>
+        <p:txBody>
+          <a:bodyPr/>
+          <a:p/>
+        </p:txBody>
       </p:sp>
       <p:sp>
         <p:nvSpPr>
@@ -7608,6 +7820,10 @@
             <a:prstDash val="solid"/>
           </a:ln>
         </p:spPr>
+        <p:txBody>
+          <a:bodyPr/>
+          <a:p/>
+        </p:txBody>
       </p:sp>
       <p:sp>
         <p:nvSpPr>
@@ -7633,6 +7849,10 @@
             <a:prstDash val="solid"/>
           </a:ln>
         </p:spPr>
+        <p:txBody>
+          <a:bodyPr/>
+          <a:p/>
+        </p:txBody>
       </p:sp>
       <p:sp>
         <p:nvSpPr>
@@ -7792,6 +8012,10 @@
             <a:prstDash val="solid"/>
           </a:ln>
         </p:spPr>
+        <p:txBody>
+          <a:bodyPr/>
+          <a:p/>
+        </p:txBody>
       </p:sp>
       <p:sp>
         <p:nvSpPr>
@@ -7953,6 +8177,10 @@
             <a:prstDash val="solid"/>
           </a:ln>
         </p:spPr>
+        <p:txBody>
+          <a:bodyPr/>
+          <a:p/>
+        </p:txBody>
       </p:sp>
       <p:sp>
         <p:nvSpPr>
@@ -8328,6 +8556,10 @@
             <a:prstDash val="solid"/>
           </a:ln>
         </p:spPr>
+        <p:txBody>
+          <a:bodyPr/>
+          <a:p/>
+        </p:txBody>
       </p:sp>
       <p:sp>
         <p:nvSpPr>
@@ -8355,6 +8587,10 @@
             <a:prstDash val="solid"/>
           </a:ln>
         </p:spPr>
+        <p:txBody>
+          <a:bodyPr/>
+          <a:p/>
+        </p:txBody>
       </p:sp>
       <p:sp>
         <p:nvSpPr>
@@ -8420,6 +8656,10 @@
             <a:prstDash val="solid"/>
           </a:ln>
         </p:spPr>
+        <p:txBody>
+          <a:bodyPr/>
+          <a:p/>
+        </p:txBody>
       </p:sp>
       <p:sp>
         <p:nvSpPr>
@@ -8485,6 +8725,10 @@
             <a:prstDash val="solid"/>
           </a:ln>
         </p:spPr>
+        <p:txBody>
+          <a:bodyPr/>
+          <a:p/>
+        </p:txBody>
       </p:sp>
       <p:sp>
         <p:nvSpPr>
@@ -8550,6 +8794,10 @@
             <a:prstDash val="solid"/>
           </a:ln>
         </p:spPr>
+        <p:txBody>
+          <a:bodyPr/>
+          <a:p/>
+        </p:txBody>
       </p:sp>
       <p:sp>
         <p:nvSpPr>
@@ -8615,6 +8863,10 @@
             <a:prstDash val="solid"/>
           </a:ln>
         </p:spPr>
+        <p:txBody>
+          <a:bodyPr/>
+          <a:p/>
+        </p:txBody>
       </p:sp>
       <p:sp>
         <p:nvSpPr>
@@ -8680,6 +8932,10 @@
             <a:prstDash val="solid"/>
           </a:ln>
         </p:spPr>
+        <p:txBody>
+          <a:bodyPr/>
+          <a:p/>
+        </p:txBody>
       </p:sp>
       <p:sp>
         <p:nvSpPr>
@@ -8743,6 +8999,10 @@
             <a:prstDash val="solid"/>
           </a:ln>
         </p:spPr>
+        <p:txBody>
+          <a:bodyPr/>
+          <a:p/>
+        </p:txBody>
       </p:sp>
       <p:sp>
         <p:nvSpPr>
@@ -8996,6 +9256,10 @@
             <a:prstDash val="solid"/>
           </a:ln>
         </p:spPr>
+        <p:txBody>
+          <a:bodyPr/>
+          <a:p/>
+        </p:txBody>
       </p:sp>
       <p:sp>
         <p:nvSpPr>
@@ -9023,6 +9287,10 @@
             <a:prstDash val="solid"/>
           </a:ln>
         </p:spPr>
+        <p:txBody>
+          <a:bodyPr/>
+          <a:p/>
+        </p:txBody>
       </p:sp>
       <p:sp>
         <p:nvSpPr>
@@ -9102,6 +9370,10 @@
             <a:prstDash val="solid"/>
           </a:ln>
         </p:spPr>
+        <p:txBody>
+          <a:bodyPr/>
+          <a:p/>
+        </p:txBody>
       </p:sp>
       <p:sp>
         <p:nvSpPr>
@@ -9181,6 +9453,10 @@
             <a:prstDash val="solid"/>
           </a:ln>
         </p:spPr>
+        <p:txBody>
+          <a:bodyPr/>
+          <a:p/>
+        </p:txBody>
       </p:sp>
       <p:sp>
         <p:nvSpPr>
@@ -9260,6 +9536,10 @@
             <a:prstDash val="solid"/>
           </a:ln>
         </p:spPr>
+        <p:txBody>
+          <a:bodyPr/>
+          <a:p/>
+        </p:txBody>
       </p:sp>
       <p:sp>
         <p:nvSpPr>
@@ -9339,6 +9619,10 @@
             <a:prstDash val="solid"/>
           </a:ln>
         </p:spPr>
+        <p:txBody>
+          <a:bodyPr/>
+          <a:p/>
+        </p:txBody>
       </p:sp>
       <p:sp>
         <p:nvSpPr>
@@ -9418,6 +9702,10 @@
             <a:prstDash val="solid"/>
           </a:ln>
         </p:spPr>
+        <p:txBody>
+          <a:bodyPr/>
+          <a:p/>
+        </p:txBody>
       </p:sp>
       <p:sp>
         <p:nvSpPr>
@@ -9709,6 +9997,10 @@
             <a:prstDash val="solid"/>
           </a:ln>
         </p:spPr>
+        <p:txBody>
+          <a:bodyPr/>
+          <a:p/>
+        </p:txBody>
       </p:sp>
       <p:sp>
         <p:nvSpPr>
@@ -9740,7 +10032,7 @@
                   <a:srgbClr val="9B2C2C"/>
                 </a:solidFill>
               </a:rPr>
-              <a:t>Do not build the full app first.</a:t>
+              <a:t>The browser MVP and native wrapper already exist.</a:t>
             </a:r>
             <a:endParaRPr lang="en-US" sz="2700" dirty="0"/>
           </a:p>
@@ -9776,7 +10068,7 @@
                   <a:srgbClr val="2E8B57"/>
                 </a:solidFill>
               </a:rPr>
-              <a:t>Build proof first.</a:t>
+              <a:t>Build proof next.</a:t>
             </a:r>
             <a:endParaRPr lang="en-US" sz="3100" dirty="0"/>
           </a:p>
@@ -9806,6 +10098,10 @@
             <a:tailEnd type="triangle"/>
           </a:ln>
         </p:spPr>
+        <p:txBody>
+          <a:bodyPr/>
+          <a:p/>
+        </p:txBody>
       </p:sp>
       <p:sp>
         <p:nvSpPr>
@@ -9833,6 +10129,10 @@
             <a:prstDash val="solid"/>
           </a:ln>
         </p:spPr>
+        <p:txBody>
+          <a:bodyPr/>
+          <a:p/>
+        </p:txBody>
       </p:sp>
       <p:sp>
         <p:nvSpPr>
@@ -9886,7 +10186,7 @@
                   <a:srgbClr val="1C252E"/>
                 </a:solidFill>
               </a:rPr>
-              <a:t>Full app -&gt; no users -&gt; wasted time</a:t>
+              <a:t>App without users -&gt; weak evidence</a:t>
             </a:r>
             <a:endParaRPr lang="en-US" sz="1700" dirty="0"/>
           </a:p>
@@ -9918,6 +10218,10 @@
             <a:prstDash val="solid"/>
           </a:ln>
         </p:spPr>
+        <p:txBody>
+          <a:bodyPr/>
+          <a:p/>
+        </p:txBody>
       </p:sp>
       <p:sp>
         <p:nvSpPr>
@@ -9971,7 +10275,7 @@
                   <a:srgbClr val="1C252E"/>
                 </a:solidFill>
               </a:rPr>
-              <a:t>Manual pilot -&gt; evidence -&gt; focused MVP</a:t>
+              <a:t>App-led concierge pilot -&gt; evidence -&gt; focused improvements</a:t>
             </a:r>
             <a:endParaRPr lang="en-US" sz="1700" dirty="0"/>
           </a:p>
@@ -10215,6 +10519,10 @@
             <a:prstDash val="solid"/>
           </a:ln>
         </p:spPr>
+        <p:txBody>
+          <a:bodyPr/>
+          <a:p/>
+        </p:txBody>
       </p:sp>
       <p:sp>
         <p:nvSpPr>
@@ -10242,6 +10550,10 @@
             <a:prstDash val="solid"/>
           </a:ln>
         </p:spPr>
+        <p:txBody>
+          <a:bodyPr/>
+          <a:p/>
+        </p:txBody>
       </p:sp>
       <p:sp>
         <p:nvSpPr>
@@ -10307,6 +10619,10 @@
             <a:prstDash val="solid"/>
           </a:ln>
         </p:spPr>
+        <p:txBody>
+          <a:bodyPr/>
+          <a:p/>
+        </p:txBody>
       </p:sp>
       <p:sp>
         <p:nvSpPr>
@@ -10372,6 +10688,10 @@
             <a:prstDash val="solid"/>
           </a:ln>
         </p:spPr>
+        <p:txBody>
+          <a:bodyPr/>
+          <a:p/>
+        </p:txBody>
       </p:sp>
       <p:sp>
         <p:nvSpPr>
@@ -10437,6 +10757,10 @@
             <a:prstDash val="solid"/>
           </a:ln>
         </p:spPr>
+        <p:txBody>
+          <a:bodyPr/>
+          <a:p/>
+        </p:txBody>
       </p:sp>
       <p:sp>
         <p:nvSpPr>
@@ -10502,6 +10826,10 @@
             <a:prstDash val="solid"/>
           </a:ln>
         </p:spPr>
+        <p:txBody>
+          <a:bodyPr/>
+          <a:p/>
+        </p:txBody>
       </p:sp>
       <p:sp>
         <p:nvSpPr>
@@ -10567,6 +10895,10 @@
             <a:prstDash val="solid"/>
           </a:ln>
         </p:spPr>
+        <p:txBody>
+          <a:bodyPr/>
+          <a:p/>
+        </p:txBody>
       </p:sp>
       <p:sp>
         <p:nvSpPr>
@@ -10632,6 +10964,10 @@
             <a:prstDash val="solid"/>
           </a:ln>
         </p:spPr>
+        <p:txBody>
+          <a:bodyPr/>
+          <a:p/>
+        </p:txBody>
       </p:sp>
       <p:sp>
         <p:nvSpPr>
@@ -10697,6 +11033,10 @@
             <a:prstDash val="solid"/>
           </a:ln>
         </p:spPr>
+        <p:txBody>
+          <a:bodyPr/>
+          <a:p/>
+        </p:txBody>
       </p:sp>
       <p:sp>
         <p:nvSpPr>
@@ -10762,6 +11102,10 @@
             <a:prstDash val="solid"/>
           </a:ln>
         </p:spPr>
+        <p:txBody>
+          <a:bodyPr/>
+          <a:p/>
+        </p:txBody>
       </p:sp>
       <p:sp>
         <p:nvSpPr>
@@ -10827,6 +11171,10 @@
             <a:prstDash val="solid"/>
           </a:ln>
         </p:spPr>
+        <p:txBody>
+          <a:bodyPr/>
+          <a:p/>
+        </p:txBody>
       </p:sp>
       <p:sp>
         <p:nvSpPr>
@@ -10892,6 +11240,10 @@
             <a:prstDash val="solid"/>
           </a:ln>
         </p:spPr>
+        <p:txBody>
+          <a:bodyPr/>
+          <a:p/>
+        </p:txBody>
       </p:sp>
       <p:sp>
         <p:nvSpPr>
@@ -11133,6 +11485,10 @@
             <a:prstDash val="solid"/>
           </a:ln>
         </p:spPr>
+        <p:txBody>
+          <a:bodyPr/>
+          <a:p/>
+        </p:txBody>
       </p:sp>
       <p:sp>
         <p:nvSpPr>
@@ -11160,6 +11516,10 @@
             <a:prstDash val="solid"/>
           </a:ln>
         </p:spPr>
+        <p:txBody>
+          <a:bodyPr/>
+          <a:p/>
+        </p:txBody>
       </p:sp>
       <p:sp>
         <p:nvSpPr>
@@ -11261,6 +11621,10 @@
             <a:prstDash val="solid"/>
           </a:ln>
         </p:spPr>
+        <p:txBody>
+          <a:bodyPr/>
+          <a:p/>
+        </p:txBody>
       </p:sp>
       <p:sp>
         <p:nvSpPr>
@@ -11362,6 +11726,10 @@
             <a:prstDash val="solid"/>
           </a:ln>
         </p:spPr>
+        <p:txBody>
+          <a:bodyPr/>
+          <a:p/>
+        </p:txBody>
       </p:sp>
       <p:sp>
         <p:nvSpPr>
@@ -11463,6 +11831,10 @@
             <a:prstDash val="solid"/>
           </a:ln>
         </p:spPr>
+        <p:txBody>
+          <a:bodyPr/>
+          <a:p/>
+        </p:txBody>
       </p:sp>
       <p:sp>
         <p:nvSpPr>
@@ -11564,6 +11936,10 @@
             <a:prstDash val="solid"/>
           </a:ln>
         </p:spPr>
+        <p:txBody>
+          <a:bodyPr/>
+          <a:p/>
+        </p:txBody>
       </p:sp>
       <p:sp>
         <p:nvSpPr>
@@ -11665,6 +12041,10 @@
             <a:prstDash val="solid"/>
           </a:ln>
         </p:spPr>
+        <p:txBody>
+          <a:bodyPr/>
+          <a:p/>
+        </p:txBody>
       </p:sp>
       <p:sp>
         <p:nvSpPr>
@@ -11766,6 +12146,10 @@
             <a:prstDash val="solid"/>
           </a:ln>
         </p:spPr>
+        <p:txBody>
+          <a:bodyPr/>
+          <a:p/>
+        </p:txBody>
       </p:sp>
       <p:sp>
         <p:nvSpPr>
@@ -12080,6 +12464,10 @@
             <a:prstDash val="solid"/>
           </a:ln>
         </p:spPr>
+        <p:txBody>
+          <a:bodyPr/>
+          <a:p/>
+        </p:txBody>
       </p:sp>
       <p:sp>
         <p:nvSpPr>
@@ -12181,6 +12569,10 @@
             <a:prstDash val="solid"/>
           </a:ln>
         </p:spPr>
+        <p:txBody>
+          <a:bodyPr/>
+          <a:p/>
+        </p:txBody>
       </p:sp>
       <p:sp>
         <p:nvSpPr>
@@ -12282,6 +12674,10 @@
             <a:prstDash val="solid"/>
           </a:ln>
         </p:spPr>
+        <p:txBody>
+          <a:bodyPr/>
+          <a:p/>
+        </p:txBody>
       </p:sp>
       <p:sp>
         <p:nvSpPr>
@@ -12383,6 +12779,10 @@
             <a:prstDash val="solid"/>
           </a:ln>
         </p:spPr>
+        <p:txBody>
+          <a:bodyPr/>
+          <a:p/>
+        </p:txBody>
       </p:sp>
       <p:sp>
         <p:nvSpPr>
@@ -12484,6 +12884,10 @@
             <a:prstDash val="solid"/>
           </a:ln>
         </p:spPr>
+        <p:txBody>
+          <a:bodyPr/>
+          <a:p/>
+        </p:txBody>
       </p:sp>
       <p:sp>
         <p:nvSpPr>
@@ -12585,6 +12989,10 @@
             <a:prstDash val="solid"/>
           </a:ln>
         </p:spPr>
+        <p:txBody>
+          <a:bodyPr/>
+          <a:p/>
+        </p:txBody>
       </p:sp>
       <p:sp>
         <p:nvSpPr>
@@ -12898,6 +13306,10 @@
             <a:prstDash val="solid"/>
           </a:ln>
         </p:spPr>
+        <p:txBody>
+          <a:bodyPr/>
+          <a:p/>
+        </p:txBody>
       </p:sp>
       <p:sp>
         <p:nvSpPr>
@@ -12923,6 +13335,10 @@
             <a:tailEnd type="triangle"/>
           </a:ln>
         </p:spPr>
+        <p:txBody>
+          <a:bodyPr/>
+          <a:p/>
+        </p:txBody>
       </p:sp>
       <p:sp>
         <p:nvSpPr>
@@ -12950,6 +13366,10 @@
             <a:prstDash val="solid"/>
           </a:ln>
         </p:spPr>
+        <p:txBody>
+          <a:bodyPr/>
+          <a:p/>
+        </p:txBody>
       </p:sp>
       <p:sp>
         <p:nvSpPr>
@@ -13051,6 +13471,10 @@
             <a:prstDash val="solid"/>
           </a:ln>
         </p:spPr>
+        <p:txBody>
+          <a:bodyPr/>
+          <a:p/>
+        </p:txBody>
       </p:sp>
       <p:sp>
         <p:nvSpPr>
@@ -13152,6 +13576,10 @@
             <a:prstDash val="solid"/>
           </a:ln>
         </p:spPr>
+        <p:txBody>
+          <a:bodyPr/>
+          <a:p/>
+        </p:txBody>
       </p:sp>
       <p:sp>
         <p:nvSpPr>
@@ -13253,6 +13681,10 @@
             <a:prstDash val="solid"/>
           </a:ln>
         </p:spPr>
+        <p:txBody>
+          <a:bodyPr/>
+          <a:p/>
+        </p:txBody>
       </p:sp>
       <p:sp>
         <p:nvSpPr>
@@ -13354,6 +13786,10 @@
             <a:prstDash val="solid"/>
           </a:ln>
         </p:spPr>
+        <p:txBody>
+          <a:bodyPr/>
+          <a:p/>
+        </p:txBody>
       </p:sp>
       <p:sp>
         <p:nvSpPr>
@@ -13455,6 +13891,10 @@
             <a:prstDash val="solid"/>
           </a:ln>
         </p:spPr>
+        <p:txBody>
+          <a:bodyPr/>
+          <a:p/>
+        </p:txBody>
       </p:sp>
       <p:sp>
         <p:nvSpPr>
@@ -13696,6 +14136,10 @@
             <a:prstDash val="solid"/>
           </a:ln>
         </p:spPr>
+        <p:txBody>
+          <a:bodyPr/>
+          <a:p/>
+        </p:txBody>
       </p:sp>
       <p:sp>
         <p:nvSpPr>
@@ -13797,6 +14241,10 @@
             <a:prstDash val="solid"/>
           </a:ln>
         </p:spPr>
+        <p:txBody>
+          <a:bodyPr/>
+          <a:p/>
+        </p:txBody>
       </p:sp>
       <p:sp>
         <p:nvSpPr>
@@ -13862,6 +14310,10 @@
             <a:prstDash val="solid"/>
           </a:ln>
         </p:spPr>
+        <p:txBody>
+          <a:bodyPr/>
+          <a:p/>
+        </p:txBody>
       </p:sp>
       <p:sp>
         <p:nvSpPr>
@@ -13927,6 +14379,10 @@
             <a:prstDash val="solid"/>
           </a:ln>
         </p:spPr>
+        <p:txBody>
+          <a:bodyPr/>
+          <a:p/>
+        </p:txBody>
       </p:sp>
       <p:sp>
         <p:nvSpPr>
@@ -13992,6 +14448,10 @@
             <a:prstDash val="solid"/>
           </a:ln>
         </p:spPr>
+        <p:txBody>
+          <a:bodyPr/>
+          <a:p/>
+        </p:txBody>
       </p:sp>
       <p:sp>
         <p:nvSpPr>
@@ -14057,6 +14517,10 @@
             <a:prstDash val="solid"/>
           </a:ln>
         </p:spPr>
+        <p:txBody>
+          <a:bodyPr/>
+          <a:p/>
+        </p:txBody>
       </p:sp>
       <p:sp>
         <p:nvSpPr>
@@ -14376,6 +14840,10 @@
             <a:prstDash val="solid"/>
           </a:ln>
         </p:spPr>
+        <p:txBody>
+          <a:bodyPr/>
+          <a:p/>
+        </p:txBody>
       </p:sp>
       <p:sp>
         <p:nvSpPr>
@@ -14403,6 +14871,10 @@
             <a:prstDash val="solid"/>
           </a:ln>
         </p:spPr>
+        <p:txBody>
+          <a:bodyPr/>
+          <a:p/>
+        </p:txBody>
       </p:sp>
       <p:sp>
         <p:nvSpPr>
@@ -14468,6 +14940,10 @@
             <a:prstDash val="solid"/>
           </a:ln>
         </p:spPr>
+        <p:txBody>
+          <a:bodyPr/>
+          <a:p/>
+        </p:txBody>
       </p:sp>
       <p:sp>
         <p:nvSpPr>
@@ -14533,6 +15009,10 @@
             <a:prstDash val="solid"/>
           </a:ln>
         </p:spPr>
+        <p:txBody>
+          <a:bodyPr/>
+          <a:p/>
+        </p:txBody>
       </p:sp>
       <p:sp>
         <p:nvSpPr>
@@ -14598,6 +15078,10 @@
             <a:prstDash val="solid"/>
           </a:ln>
         </p:spPr>
+        <p:txBody>
+          <a:bodyPr/>
+          <a:p/>
+        </p:txBody>
       </p:sp>
       <p:sp>
         <p:nvSpPr>
@@ -14663,6 +15147,10 @@
             <a:prstDash val="solid"/>
           </a:ln>
         </p:spPr>
+        <p:txBody>
+          <a:bodyPr/>
+          <a:p/>
+        </p:txBody>
       </p:sp>
       <p:sp>
         <p:nvSpPr>
@@ -14728,6 +15216,10 @@
             <a:prstDash val="solid"/>
           </a:ln>
         </p:spPr>
+        <p:txBody>
+          <a:bodyPr/>
+          <a:p/>
+        </p:txBody>
       </p:sp>
       <p:sp>
         <p:nvSpPr>
@@ -14793,6 +15285,10 @@
             <a:prstDash val="solid"/>
           </a:ln>
         </p:spPr>
+        <p:txBody>
+          <a:bodyPr/>
+          <a:p/>
+        </p:txBody>
       </p:sp>
       <p:sp>
         <p:nvSpPr>
@@ -14858,6 +15354,10 @@
             <a:prstDash val="solid"/>
           </a:ln>
         </p:spPr>
+        <p:txBody>
+          <a:bodyPr/>
+          <a:p/>
+        </p:txBody>
       </p:sp>
       <p:sp>
         <p:nvSpPr>
@@ -14923,6 +15423,10 @@
             <a:prstDash val="solid"/>
           </a:ln>
         </p:spPr>
+        <p:txBody>
+          <a:bodyPr/>
+          <a:p/>
+        </p:txBody>
       </p:sp>
       <p:sp>
         <p:nvSpPr>
@@ -14988,6 +15492,10 @@
             <a:prstDash val="solid"/>
           </a:ln>
         </p:spPr>
+        <p:txBody>
+          <a:bodyPr/>
+          <a:p/>
+        </p:txBody>
       </p:sp>
       <p:sp>
         <p:nvSpPr>
@@ -15265,6 +15773,10 @@
             <a:prstDash val="solid"/>
           </a:ln>
         </p:spPr>
+        <p:txBody>
+          <a:bodyPr/>
+          <a:p/>
+        </p:txBody>
       </p:sp>
       <p:sp>
         <p:nvSpPr>
@@ -15292,6 +15804,10 @@
             <a:prstDash val="solid"/>
           </a:ln>
         </p:spPr>
+        <p:txBody>
+          <a:bodyPr/>
+          <a:p/>
+        </p:txBody>
       </p:sp>
       <p:sp>
         <p:nvSpPr>
@@ -15371,6 +15887,10 @@
             <a:prstDash val="solid"/>
           </a:ln>
         </p:spPr>
+        <p:txBody>
+          <a:bodyPr/>
+          <a:p/>
+        </p:txBody>
       </p:sp>
       <p:sp>
         <p:nvSpPr>
@@ -15450,6 +15970,10 @@
             <a:prstDash val="solid"/>
           </a:ln>
         </p:spPr>
+        <p:txBody>
+          <a:bodyPr/>
+          <a:p/>
+        </p:txBody>
       </p:sp>
       <p:sp>
         <p:nvSpPr>
@@ -15529,6 +16053,10 @@
             <a:prstDash val="solid"/>
           </a:ln>
         </p:spPr>
+        <p:txBody>
+          <a:bodyPr/>
+          <a:p/>
+        </p:txBody>
       </p:sp>
       <p:sp>
         <p:nvSpPr>
@@ -15608,6 +16136,10 @@
             <a:prstDash val="solid"/>
           </a:ln>
         </p:spPr>
+        <p:txBody>
+          <a:bodyPr/>
+          <a:p/>
+        </p:txBody>
       </p:sp>
       <p:sp>
         <p:nvSpPr>
@@ -15687,6 +16219,10 @@
             <a:prstDash val="solid"/>
           </a:ln>
         </p:spPr>
+        <p:txBody>
+          <a:bodyPr/>
+          <a:p/>
+        </p:txBody>
       </p:sp>
       <p:sp>
         <p:nvSpPr>
@@ -15766,6 +16302,10 @@
             <a:prstDash val="solid"/>
           </a:ln>
         </p:spPr>
+        <p:txBody>
+          <a:bodyPr/>
+          <a:p/>
+        </p:txBody>
       </p:sp>
       <p:sp>
         <p:nvSpPr>
@@ -15845,6 +16385,10 @@
             <a:prstDash val="solid"/>
           </a:ln>
         </p:spPr>
+        <p:txBody>
+          <a:bodyPr/>
+          <a:p/>
+        </p:txBody>
       </p:sp>
       <p:sp>
         <p:nvSpPr>
@@ -16103,12 +16647,7 @@
               <a:buNone/>
             </a:pPr>
             <a:r>
-              <a:rPr lang="en-US" sz="1080" dirty="0">
-                <a:solidFill>
-                  <a:srgbClr val="5B6770"/>
-                </a:solidFill>
-              </a:rPr>
-              <a:t>Use simple tools first. Let the process teach the software.</a:t>
+              <a:t>Use the existing app first. Let the concierge pilot teach the next improvements.</a:t>
             </a:r>
             <a:endParaRPr lang="en-US" sz="1080" dirty="0"/>
           </a:p>
@@ -16136,6 +16675,10 @@
             <a:prstDash val="solid"/>
           </a:ln>
         </p:spPr>
+        <p:txBody>
+          <a:bodyPr/>
+          <a:p/>
+        </p:txBody>
       </p:sp>
       <p:sp>
         <p:nvSpPr>
@@ -16163,6 +16706,10 @@
             <a:prstDash val="solid"/>
           </a:ln>
         </p:spPr>
+        <p:txBody>
+          <a:bodyPr/>
+          <a:p/>
+        </p:txBody>
       </p:sp>
       <p:sp>
         <p:nvSpPr>
@@ -16242,6 +16789,10 @@
             <a:prstDash val="solid"/>
           </a:ln>
         </p:spPr>
+        <p:txBody>
+          <a:bodyPr/>
+          <a:p/>
+        </p:txBody>
       </p:sp>
       <p:sp>
         <p:nvSpPr>
@@ -16270,28 +16821,14 @@
               <a:buNone/>
             </a:pPr>
             <a:r>
-              <a:rPr lang="en-US" sz="1600" b="1" dirty="0">
-                <a:solidFill>
-                  <a:srgbClr val="1C252E"/>
-                </a:solidFill>
-              </a:rPr>
-              <a:t>Provider Form</a:t>
+              <a:t>In-app provider interview</a:t>
             </a:r>
             <a:endParaRPr lang="en-US" sz="1600" dirty="0"/>
           </a:p>
           <a:p>
-            <a:pPr marL="0" indent="0" algn="ctr">
-              <a:buNone/>
-            </a:pPr>
-            <a:r>
-              <a:rPr lang="en-US" sz="1600" b="1" dirty="0">
-                <a:solidFill>
-                  <a:srgbClr val="1C252E"/>
-                </a:solidFill>
-              </a:rPr>
+            <a:r>
               <a:t>supply intake</a:t>
             </a:r>
-            <a:endParaRPr lang="en-US" sz="1600" dirty="0"/>
           </a:p>
         </p:txBody>
       </p:sp>
@@ -16321,6 +16858,10 @@
             <a:prstDash val="solid"/>
           </a:ln>
         </p:spPr>
+        <p:txBody>
+          <a:bodyPr/>
+          <a:p/>
+        </p:txBody>
       </p:sp>
       <p:sp>
         <p:nvSpPr>
@@ -16349,28 +16890,14 @@
               <a:buNone/>
             </a:pPr>
             <a:r>
-              <a:rPr lang="en-US" sz="1600" b="1" dirty="0">
-                <a:solidFill>
-                  <a:srgbClr val="1C252E"/>
-                </a:solidFill>
-              </a:rPr>
-              <a:t>Client Request Form</a:t>
+              <a:t>In-app client survey/request</a:t>
             </a:r>
             <a:endParaRPr lang="en-US" sz="1600" dirty="0"/>
           </a:p>
           <a:p>
-            <a:pPr marL="0" indent="0" algn="ctr">
-              <a:buNone/>
-            </a:pPr>
-            <a:r>
-              <a:rPr lang="en-US" sz="1600" b="1" dirty="0">
-                <a:solidFill>
-                  <a:srgbClr val="1C252E"/>
-                </a:solidFill>
-              </a:rPr>
+            <a:r>
               <a:t>demand intake</a:t>
             </a:r>
-            <a:endParaRPr lang="en-US" sz="1600" dirty="0"/>
           </a:p>
         </p:txBody>
       </p:sp>
@@ -16400,6 +16927,10 @@
             <a:prstDash val="solid"/>
           </a:ln>
         </p:spPr>
+        <p:txBody>
+          <a:bodyPr/>
+          <a:p/>
+        </p:txBody>
       </p:sp>
       <p:sp>
         <p:nvSpPr>
@@ -16479,6 +17010,10 @@
             <a:prstDash val="solid"/>
           </a:ln>
         </p:spPr>
+        <p:txBody>
+          <a:bodyPr/>
+          <a:p/>
+        </p:txBody>
       </p:sp>
       <p:sp>
         <p:nvSpPr>
@@ -16558,6 +17093,10 @@
             <a:prstDash val="solid"/>
           </a:ln>
         </p:spPr>
+        <p:txBody>
+          <a:bodyPr/>
+          <a:p/>
+        </p:txBody>
       </p:sp>
       <p:sp>
         <p:nvSpPr>
@@ -16849,6 +17388,10 @@
             <a:prstDash val="solid"/>
           </a:ln>
         </p:spPr>
+        <p:txBody>
+          <a:bodyPr/>
+          <a:p/>
+        </p:txBody>
       </p:sp>
       <p:sp>
         <p:nvSpPr>
@@ -16872,6 +17415,10 @@
             <a:prstDash val="solid"/>
           </a:ln>
         </p:spPr>
+        <p:txBody>
+          <a:bodyPr/>
+          <a:p/>
+        </p:txBody>
       </p:sp>
       <p:sp>
         <p:nvSpPr>
@@ -16969,6 +17516,10 @@
             <a:prstDash val="solid"/>
           </a:ln>
         </p:spPr>
+        <p:txBody>
+          <a:bodyPr/>
+          <a:p/>
+        </p:txBody>
       </p:sp>
       <p:sp>
         <p:nvSpPr>
@@ -17066,6 +17617,10 @@
             <a:prstDash val="solid"/>
           </a:ln>
         </p:spPr>
+        <p:txBody>
+          <a:bodyPr/>
+          <a:p/>
+        </p:txBody>
       </p:sp>
       <p:sp>
         <p:nvSpPr>
@@ -17165,6 +17720,10 @@
             <a:prstDash val="solid"/>
           </a:ln>
         </p:spPr>
+        <p:txBody>
+          <a:bodyPr/>
+          <a:p/>
+        </p:txBody>
       </p:sp>
       <p:sp>
         <p:nvSpPr>
@@ -17308,6 +17867,10 @@
             <a:prstDash val="solid"/>
           </a:ln>
         </p:spPr>
+        <p:txBody>
+          <a:bodyPr/>
+          <a:p/>
+        </p:txBody>
       </p:sp>
       <p:sp>
         <p:nvSpPr>
@@ -17611,6 +18174,10 @@
             <a:prstDash val="solid"/>
           </a:ln>
         </p:spPr>
+        <p:txBody>
+          <a:bodyPr/>
+          <a:p/>
+        </p:txBody>
       </p:sp>
       <p:sp>
         <p:nvSpPr>
@@ -17636,6 +18203,10 @@
             <a:prstDash val="solid"/>
           </a:ln>
         </p:spPr>
+        <p:txBody>
+          <a:bodyPr/>
+          <a:p/>
+        </p:txBody>
       </p:sp>
       <p:sp>
         <p:nvSpPr>
@@ -17746,6 +18317,10 @@
             <a:prstDash val="solid"/>
           </a:ln>
         </p:spPr>
+        <p:txBody>
+          <a:bodyPr/>
+          <a:p/>
+        </p:txBody>
       </p:sp>
       <p:sp>
         <p:nvSpPr>
@@ -17856,6 +18431,10 @@
             <a:prstDash val="solid"/>
           </a:ln>
         </p:spPr>
+        <p:txBody>
+          <a:bodyPr/>
+          <a:p/>
+        </p:txBody>
       </p:sp>
       <p:sp>
         <p:nvSpPr>
@@ -17966,6 +18545,10 @@
             <a:prstDash val="solid"/>
           </a:ln>
         </p:spPr>
+        <p:txBody>
+          <a:bodyPr/>
+          <a:p/>
+        </p:txBody>
       </p:sp>
       <p:sp>
         <p:nvSpPr>
@@ -18076,6 +18659,10 @@
             <a:prstDash val="solid"/>
           </a:ln>
         </p:spPr>
+        <p:txBody>
+          <a:bodyPr/>
+          <a:p/>
+        </p:txBody>
       </p:sp>
       <p:sp>
         <p:nvSpPr>
@@ -18188,6 +18775,10 @@
             <a:prstDash val="solid"/>
           </a:ln>
         </p:spPr>
+        <p:txBody>
+          <a:bodyPr/>
+          <a:p/>
+        </p:txBody>
       </p:sp>
       <p:sp>
         <p:nvSpPr>
